--- a/docs/Slides/5_documentation.pptx
+++ b/docs/Slides/5_documentation.pptx
@@ -117,6 +117,27 @@
 </p:presentation>
 </file>
 
+<file path=ppt/changesInfos/changesInfo1.xml><?xml version="1.0" encoding="utf-8"?>
+<pc:chgInfo xmlns:a="http://schemas.openxmlformats.org/drawingml/2006/main" xmlns:r="http://schemas.openxmlformats.org/officeDocument/2006/relationships" xmlns:ac="http://schemas.microsoft.com/office/drawing/2013/main/command" xmlns:pc="http://schemas.microsoft.com/office/powerpoint/2013/main/command">
+  <pc:docChgLst>
+    <pc:chgData name="Finley Griffin" userId="22b0b6c4-ce40-4dd6-a0c2-f0f65dd91442" providerId="ADAL" clId="{E340F9FE-63CF-5DC1-BB85-0501F5A6B451}"/>
+    <pc:docChg chg="modSld">
+      <pc:chgData name="Finley Griffin" userId="22b0b6c4-ce40-4dd6-a0c2-f0f65dd91442" providerId="ADAL" clId="{E340F9FE-63CF-5DC1-BB85-0501F5A6B451}" dt="2026-03-09T17:15:05.243" v="77" actId="20577"/>
+      <pc:docMkLst>
+        <pc:docMk/>
+      </pc:docMkLst>
+      <pc:sldChg chg="modNotesTx">
+        <pc:chgData name="Finley Griffin" userId="22b0b6c4-ce40-4dd6-a0c2-f0f65dd91442" providerId="ADAL" clId="{E340F9FE-63CF-5DC1-BB85-0501F5A6B451}" dt="2026-03-09T17:15:05.243" v="77" actId="20577"/>
+        <pc:sldMkLst>
+          <pc:docMk/>
+          <pc:sldMk cId="3097149031" sldId="350"/>
+        </pc:sldMkLst>
+      </pc:sldChg>
+    </pc:docChg>
+  </pc:docChgLst>
+</pc:chgInfo>
+</file>
+
 <file path=ppt/notesMasters/notesMaster1.xml><?xml version="1.0" encoding="utf-8"?>
 <p:notesMaster xmlns:a="http://schemas.openxmlformats.org/drawingml/2006/main" xmlns:r="http://schemas.openxmlformats.org/officeDocument/2006/relationships" xmlns:p="http://schemas.openxmlformats.org/presentationml/2006/main">
   <p:cSld>
@@ -199,7 +220,7 @@
           <a:p>
             <a:fld id="{4BA524F3-CDF2-904F-A518-B8BC35D88E68}" type="datetimeFigureOut">
               <a:rPr lang="en-US" smtClean="0"/>
-              <a:t>4/29/24</a:t>
+              <a:t>3/9/26</a:t>
             </a:fld>
             <a:endParaRPr lang="en-US"/>
           </a:p>
@@ -619,6 +640,15 @@
               <a:t>Static type checkers</a:t>
             </a:r>
           </a:p>
+          <a:p>
+            <a:endParaRPr lang="en-US" dirty="0"/>
+          </a:p>
+          <a:p>
+            <a:r>
+              <a:rPr lang="en-US" dirty="0"/>
+              <a:t>Implemented both in your IDE and as pre-commit hooks</a:t>
+            </a:r>
+          </a:p>
         </p:txBody>
       </p:sp>
       <p:sp>
@@ -806,7 +836,7 @@
           <a:p>
             <a:fld id="{75A40454-21E4-9547-8D60-F76BC3A53DAF}" type="datetimeFigureOut">
               <a:rPr lang="en-US" smtClean="0"/>
-              <a:t>4/29/24</a:t>
+              <a:t>3/9/26</a:t>
             </a:fld>
             <a:endParaRPr lang="en-US"/>
           </a:p>
@@ -1006,7 +1036,7 @@
           <a:p>
             <a:fld id="{75A40454-21E4-9547-8D60-F76BC3A53DAF}" type="datetimeFigureOut">
               <a:rPr lang="en-US" smtClean="0"/>
-              <a:t>4/29/24</a:t>
+              <a:t>3/9/26</a:t>
             </a:fld>
             <a:endParaRPr lang="en-US"/>
           </a:p>
@@ -1216,7 +1246,7 @@
           <a:p>
             <a:fld id="{75A40454-21E4-9547-8D60-F76BC3A53DAF}" type="datetimeFigureOut">
               <a:rPr lang="en-US" smtClean="0"/>
-              <a:t>4/29/24</a:t>
+              <a:t>3/9/26</a:t>
             </a:fld>
             <a:endParaRPr lang="en-US"/>
           </a:p>
@@ -2139,7 +2169,7 @@
           <a:p>
             <a:fld id="{75A40454-21E4-9547-8D60-F76BC3A53DAF}" type="datetimeFigureOut">
               <a:rPr lang="en-US" smtClean="0"/>
-              <a:t>4/29/24</a:t>
+              <a:t>3/9/26</a:t>
             </a:fld>
             <a:endParaRPr lang="en-US"/>
           </a:p>
@@ -2415,7 +2445,7 @@
           <a:p>
             <a:fld id="{75A40454-21E4-9547-8D60-F76BC3A53DAF}" type="datetimeFigureOut">
               <a:rPr lang="en-US" smtClean="0"/>
-              <a:t>4/29/24</a:t>
+              <a:t>3/9/26</a:t>
             </a:fld>
             <a:endParaRPr lang="en-US"/>
           </a:p>
@@ -2683,7 +2713,7 @@
           <a:p>
             <a:fld id="{75A40454-21E4-9547-8D60-F76BC3A53DAF}" type="datetimeFigureOut">
               <a:rPr lang="en-US" smtClean="0"/>
-              <a:t>4/29/24</a:t>
+              <a:t>3/9/26</a:t>
             </a:fld>
             <a:endParaRPr lang="en-US"/>
           </a:p>
@@ -3098,7 +3128,7 @@
           <a:p>
             <a:fld id="{75A40454-21E4-9547-8D60-F76BC3A53DAF}" type="datetimeFigureOut">
               <a:rPr lang="en-US" smtClean="0"/>
-              <a:t>4/29/24</a:t>
+              <a:t>3/9/26</a:t>
             </a:fld>
             <a:endParaRPr lang="en-US"/>
           </a:p>
@@ -3240,7 +3270,7 @@
           <a:p>
             <a:fld id="{75A40454-21E4-9547-8D60-F76BC3A53DAF}" type="datetimeFigureOut">
               <a:rPr lang="en-US" smtClean="0"/>
-              <a:t>4/29/24</a:t>
+              <a:t>3/9/26</a:t>
             </a:fld>
             <a:endParaRPr lang="en-US"/>
           </a:p>
@@ -3353,7 +3383,7 @@
           <a:p>
             <a:fld id="{75A40454-21E4-9547-8D60-F76BC3A53DAF}" type="datetimeFigureOut">
               <a:rPr lang="en-US" smtClean="0"/>
-              <a:t>4/29/24</a:t>
+              <a:t>3/9/26</a:t>
             </a:fld>
             <a:endParaRPr lang="en-US"/>
           </a:p>
@@ -3666,7 +3696,7 @@
           <a:p>
             <a:fld id="{75A40454-21E4-9547-8D60-F76BC3A53DAF}" type="datetimeFigureOut">
               <a:rPr lang="en-US" smtClean="0"/>
-              <a:t>4/29/24</a:t>
+              <a:t>3/9/26</a:t>
             </a:fld>
             <a:endParaRPr lang="en-US"/>
           </a:p>
@@ -3955,7 +3985,7 @@
           <a:p>
             <a:fld id="{75A40454-21E4-9547-8D60-F76BC3A53DAF}" type="datetimeFigureOut">
               <a:rPr lang="en-US" smtClean="0"/>
-              <a:t>4/29/24</a:t>
+              <a:t>3/9/26</a:t>
             </a:fld>
             <a:endParaRPr lang="en-US"/>
           </a:p>
@@ -4198,7 +4228,7 @@
           <a:p>
             <a:fld id="{75A40454-21E4-9547-8D60-F76BC3A53DAF}" type="datetimeFigureOut">
               <a:rPr lang="en-US" smtClean="0"/>
-              <a:t>4/29/24</a:t>
+              <a:t>3/9/26</a:t>
             </a:fld>
             <a:endParaRPr lang="en-US"/>
           </a:p>

--- a/docs/Slides/5_documentation.pptx
+++ b/docs/Slides/5_documentation.pptx
@@ -122,12 +122,12 @@
   <pc:docChgLst>
     <pc:chgData name="Finley Griffin" userId="22b0b6c4-ce40-4dd6-a0c2-f0f65dd91442" providerId="ADAL" clId="{E340F9FE-63CF-5DC1-BB85-0501F5A6B451}"/>
     <pc:docChg chg="modSld">
-      <pc:chgData name="Finley Griffin" userId="22b0b6c4-ce40-4dd6-a0c2-f0f65dd91442" providerId="ADAL" clId="{E340F9FE-63CF-5DC1-BB85-0501F5A6B451}" dt="2026-03-09T17:15:05.243" v="77" actId="20577"/>
+      <pc:chgData name="Finley Griffin" userId="22b0b6c4-ce40-4dd6-a0c2-f0f65dd91442" providerId="ADAL" clId="{E340F9FE-63CF-5DC1-BB85-0501F5A6B451}" dt="2026-03-10T15:11:33.691" v="138" actId="20577"/>
       <pc:docMkLst>
         <pc:docMk/>
       </pc:docMkLst>
       <pc:sldChg chg="modNotesTx">
-        <pc:chgData name="Finley Griffin" userId="22b0b6c4-ce40-4dd6-a0c2-f0f65dd91442" providerId="ADAL" clId="{E340F9FE-63CF-5DC1-BB85-0501F5A6B451}" dt="2026-03-09T17:15:05.243" v="77" actId="20577"/>
+        <pc:chgData name="Finley Griffin" userId="22b0b6c4-ce40-4dd6-a0c2-f0f65dd91442" providerId="ADAL" clId="{E340F9FE-63CF-5DC1-BB85-0501F5A6B451}" dt="2026-03-10T15:11:33.691" v="138" actId="20577"/>
         <pc:sldMkLst>
           <pc:docMk/>
           <pc:sldMk cId="3097149031" sldId="350"/>
@@ -220,7 +220,7 @@
           <a:p>
             <a:fld id="{4BA524F3-CDF2-904F-A518-B8BC35D88E68}" type="datetimeFigureOut">
               <a:rPr lang="en-US" smtClean="0"/>
-              <a:t>3/9/26</a:t>
+              <a:t>3/10/26</a:t>
             </a:fld>
             <a:endParaRPr lang="en-US"/>
           </a:p>
@@ -649,6 +649,20 @@
               <a:t>Implemented both in your IDE and as pre-commit hooks</a:t>
             </a:r>
           </a:p>
+          <a:p>
+            <a:endParaRPr lang="en-US" dirty="0"/>
+          </a:p>
+          <a:p>
+            <a:r>
+              <a:rPr lang="en-US" dirty="0"/>
+              <a:t>Documentation repeats all of this so skip </a:t>
+            </a:r>
+            <a:r>
+              <a:rPr lang="en-US"/>
+              <a:t>to end!</a:t>
+            </a:r>
+            <a:endParaRPr lang="en-US" dirty="0"/>
+          </a:p>
         </p:txBody>
       </p:sp>
       <p:sp>
@@ -836,7 +850,7 @@
           <a:p>
             <a:fld id="{75A40454-21E4-9547-8D60-F76BC3A53DAF}" type="datetimeFigureOut">
               <a:rPr lang="en-US" smtClean="0"/>
-              <a:t>3/9/26</a:t>
+              <a:t>3/10/26</a:t>
             </a:fld>
             <a:endParaRPr lang="en-US"/>
           </a:p>
@@ -1036,7 +1050,7 @@
           <a:p>
             <a:fld id="{75A40454-21E4-9547-8D60-F76BC3A53DAF}" type="datetimeFigureOut">
               <a:rPr lang="en-US" smtClean="0"/>
-              <a:t>3/9/26</a:t>
+              <a:t>3/10/26</a:t>
             </a:fld>
             <a:endParaRPr lang="en-US"/>
           </a:p>
@@ -1246,7 +1260,7 @@
           <a:p>
             <a:fld id="{75A40454-21E4-9547-8D60-F76BC3A53DAF}" type="datetimeFigureOut">
               <a:rPr lang="en-US" smtClean="0"/>
-              <a:t>3/9/26</a:t>
+              <a:t>3/10/26</a:t>
             </a:fld>
             <a:endParaRPr lang="en-US"/>
           </a:p>
@@ -2169,7 +2183,7 @@
           <a:p>
             <a:fld id="{75A40454-21E4-9547-8D60-F76BC3A53DAF}" type="datetimeFigureOut">
               <a:rPr lang="en-US" smtClean="0"/>
-              <a:t>3/9/26</a:t>
+              <a:t>3/10/26</a:t>
             </a:fld>
             <a:endParaRPr lang="en-US"/>
           </a:p>
@@ -2445,7 +2459,7 @@
           <a:p>
             <a:fld id="{75A40454-21E4-9547-8D60-F76BC3A53DAF}" type="datetimeFigureOut">
               <a:rPr lang="en-US" smtClean="0"/>
-              <a:t>3/9/26</a:t>
+              <a:t>3/10/26</a:t>
             </a:fld>
             <a:endParaRPr lang="en-US"/>
           </a:p>
@@ -2713,7 +2727,7 @@
           <a:p>
             <a:fld id="{75A40454-21E4-9547-8D60-F76BC3A53DAF}" type="datetimeFigureOut">
               <a:rPr lang="en-US" smtClean="0"/>
-              <a:t>3/9/26</a:t>
+              <a:t>3/10/26</a:t>
             </a:fld>
             <a:endParaRPr lang="en-US"/>
           </a:p>
@@ -3128,7 +3142,7 @@
           <a:p>
             <a:fld id="{75A40454-21E4-9547-8D60-F76BC3A53DAF}" type="datetimeFigureOut">
               <a:rPr lang="en-US" smtClean="0"/>
-              <a:t>3/9/26</a:t>
+              <a:t>3/10/26</a:t>
             </a:fld>
             <a:endParaRPr lang="en-US"/>
           </a:p>
@@ -3270,7 +3284,7 @@
           <a:p>
             <a:fld id="{75A40454-21E4-9547-8D60-F76BC3A53DAF}" type="datetimeFigureOut">
               <a:rPr lang="en-US" smtClean="0"/>
-              <a:t>3/9/26</a:t>
+              <a:t>3/10/26</a:t>
             </a:fld>
             <a:endParaRPr lang="en-US"/>
           </a:p>
@@ -3383,7 +3397,7 @@
           <a:p>
             <a:fld id="{75A40454-21E4-9547-8D60-F76BC3A53DAF}" type="datetimeFigureOut">
               <a:rPr lang="en-US" smtClean="0"/>
-              <a:t>3/9/26</a:t>
+              <a:t>3/10/26</a:t>
             </a:fld>
             <a:endParaRPr lang="en-US"/>
           </a:p>
@@ -3696,7 +3710,7 @@
           <a:p>
             <a:fld id="{75A40454-21E4-9547-8D60-F76BC3A53DAF}" type="datetimeFigureOut">
               <a:rPr lang="en-US" smtClean="0"/>
-              <a:t>3/9/26</a:t>
+              <a:t>3/10/26</a:t>
             </a:fld>
             <a:endParaRPr lang="en-US"/>
           </a:p>
@@ -3985,7 +3999,7 @@
           <a:p>
             <a:fld id="{75A40454-21E4-9547-8D60-F76BC3A53DAF}" type="datetimeFigureOut">
               <a:rPr lang="en-US" smtClean="0"/>
-              <a:t>3/9/26</a:t>
+              <a:t>3/10/26</a:t>
             </a:fld>
             <a:endParaRPr lang="en-US"/>
           </a:p>
@@ -4228,7 +4242,7 @@
           <a:p>
             <a:fld id="{75A40454-21E4-9547-8D60-F76BC3A53DAF}" type="datetimeFigureOut">
               <a:rPr lang="en-US" smtClean="0"/>
-              <a:t>3/9/26</a:t>
+              <a:t>3/10/26</a:t>
             </a:fld>
             <a:endParaRPr lang="en-US"/>
           </a:p>
